--- a/OUTPUTS/presentacion_final_añadido karim.pptx
+++ b/OUTPUTS/presentacion_final_añadido karim.pptx
@@ -147,6 +147,74 @@
 </p:presentation>
 </file>
 
+<file path=ppt/revisionInfo.xml><?xml version="1.0" encoding="utf-8"?>
+<p1510:revInfo xmlns:a="http://schemas.openxmlformats.org/drawingml/2006/main" xmlns:r="http://schemas.openxmlformats.org/officeDocument/2006/relationships" xmlns:p1510="http://schemas.microsoft.com/office/powerpoint/2015/10/main">
+  <p1510:revLst>
+    <p1510:client id="{A31F125D-C662-4405-B5A2-8DFFB461D3D4}" v="1" dt="2026-05-22T06:30:00.845"/>
+  </p1510:revLst>
+</p1510:revInfo>
+</file>
+
+<file path=ppt/changesInfos/changesInfo1.xml><?xml version="1.0" encoding="utf-8"?>
+<pc:chgInfo xmlns:a="http://schemas.openxmlformats.org/drawingml/2006/main" xmlns:r="http://schemas.openxmlformats.org/officeDocument/2006/relationships" xmlns:ac="http://schemas.microsoft.com/office/drawing/2013/main/command" xmlns:pc="http://schemas.microsoft.com/office/powerpoint/2013/main/command">
+  <pc:docChgLst>
+    <pc:chgData name="karimjacob perez" userId="90064f7212f675cf" providerId="LiveId" clId="{16383BC6-DE67-4FCE-9504-2D7D55C9EFD7}"/>
+    <pc:docChg chg="modSld">
+      <pc:chgData name="karimjacob perez" userId="90064f7212f675cf" providerId="LiveId" clId="{16383BC6-DE67-4FCE-9504-2D7D55C9EFD7}" dt="2026-05-22T06:30:59.356" v="47" actId="20577"/>
+      <pc:docMkLst>
+        <pc:docMk/>
+      </pc:docMkLst>
+      <pc:sldChg chg="modSp mod">
+        <pc:chgData name="karimjacob perez" userId="90064f7212f675cf" providerId="LiveId" clId="{16383BC6-DE67-4FCE-9504-2D7D55C9EFD7}" dt="2026-05-22T06:30:59.356" v="47" actId="20577"/>
+        <pc:sldMkLst>
+          <pc:docMk/>
+          <pc:sldMk cId="0" sldId="260"/>
+        </pc:sldMkLst>
+        <pc:spChg chg="mod">
+          <ac:chgData name="karimjacob perez" userId="90064f7212f675cf" providerId="LiveId" clId="{16383BC6-DE67-4FCE-9504-2D7D55C9EFD7}" dt="2026-05-22T06:30:59.356" v="47" actId="20577"/>
+          <ac:spMkLst>
+            <pc:docMk/>
+            <pc:sldMk cId="0" sldId="260"/>
+            <ac:spMk id="7" creationId="{E46B75EB-EFC3-9C32-0C29-F3577874C00A}"/>
+          </ac:spMkLst>
+        </pc:spChg>
+      </pc:sldChg>
+      <pc:sldChg chg="modSp mod">
+        <pc:chgData name="karimjacob perez" userId="90064f7212f675cf" providerId="LiveId" clId="{16383BC6-DE67-4FCE-9504-2D7D55C9EFD7}" dt="2026-05-22T06:30:04.497" v="2" actId="1076"/>
+        <pc:sldMkLst>
+          <pc:docMk/>
+          <pc:sldMk cId="0" sldId="262"/>
+        </pc:sldMkLst>
+        <pc:spChg chg="mod">
+          <ac:chgData name="karimjacob perez" userId="90064f7212f675cf" providerId="LiveId" clId="{16383BC6-DE67-4FCE-9504-2D7D55C9EFD7}" dt="2026-05-22T06:26:08.531" v="0" actId="1076"/>
+          <ac:spMkLst>
+            <pc:docMk/>
+            <pc:sldMk cId="0" sldId="262"/>
+            <ac:spMk id="5" creationId="{BA908B03-636F-1BA9-9505-C03D56046B52}"/>
+          </ac:spMkLst>
+        </pc:spChg>
+        <pc:spChg chg="mod">
+          <ac:chgData name="karimjacob perez" userId="90064f7212f675cf" providerId="LiveId" clId="{16383BC6-DE67-4FCE-9504-2D7D55C9EFD7}" dt="2026-05-22T06:30:00.845" v="1"/>
+          <ac:spMkLst>
+            <pc:docMk/>
+            <pc:sldMk cId="0" sldId="262"/>
+            <ac:spMk id="7" creationId="{BECF93E2-A638-97A7-4AFB-B8911D8DC3A1}"/>
+          </ac:spMkLst>
+        </pc:spChg>
+        <pc:spChg chg="mod">
+          <ac:chgData name="karimjacob perez" userId="90064f7212f675cf" providerId="LiveId" clId="{16383BC6-DE67-4FCE-9504-2D7D55C9EFD7}" dt="2026-05-22T06:30:04.497" v="2" actId="1076"/>
+          <ac:spMkLst>
+            <pc:docMk/>
+            <pc:sldMk cId="0" sldId="262"/>
+            <ac:spMk id="8" creationId="{DFBB8AC0-24AD-3A20-EFD5-20B7C8CCA133}"/>
+          </ac:spMkLst>
+        </pc:spChg>
+      </pc:sldChg>
+    </pc:docChg>
+  </pc:docChgLst>
+</pc:chgInfo>
+</file>
+
 <file path=ppt/notesMasters/notesMaster1.xml><?xml version="1.0" encoding="utf-8"?>
 <p:notesMaster xmlns:a="http://schemas.openxmlformats.org/drawingml/2006/main" xmlns:r="http://schemas.openxmlformats.org/officeDocument/2006/relationships" xmlns:p="http://schemas.openxmlformats.org/presentationml/2006/main">
   <p:cSld>
@@ -229,7 +297,7 @@
           <a:p>
             <a:fld id="{806CD95F-77BF-457C-88AC-56AD4763E3AB}" type="datetimeFigureOut">
               <a:rPr lang="es-MX" smtClean="0"/>
-              <a:t>20/05/2026</a:t>
+              <a:t>22/05/2026</a:t>
             </a:fld>
             <a:endParaRPr lang="es-MX"/>
           </a:p>
@@ -676,7 +744,7 @@
           <a:p>
             <a:fld id="{5BCAD085-E8A6-8845-BD4E-CB4CCA059FC4}" type="datetimeFigureOut">
               <a:rPr lang="en-US" smtClean="0"/>
-              <a:t>5/20/2026</a:t>
+              <a:t>5/22/2026</a:t>
             </a:fld>
             <a:endParaRPr lang="en-US"/>
           </a:p>
@@ -844,7 +912,7 @@
           <a:p>
             <a:fld id="{5BCAD085-E8A6-8845-BD4E-CB4CCA059FC4}" type="datetimeFigureOut">
               <a:rPr lang="en-US" smtClean="0"/>
-              <a:t>5/20/2026</a:t>
+              <a:t>5/22/2026</a:t>
             </a:fld>
             <a:endParaRPr lang="en-US"/>
           </a:p>
@@ -1022,7 +1090,7 @@
           <a:p>
             <a:fld id="{5BCAD085-E8A6-8845-BD4E-CB4CCA059FC4}" type="datetimeFigureOut">
               <a:rPr lang="en-US" smtClean="0"/>
-              <a:t>5/20/2026</a:t>
+              <a:t>5/22/2026</a:t>
             </a:fld>
             <a:endParaRPr lang="en-US"/>
           </a:p>
@@ -1190,7 +1258,7 @@
           <a:p>
             <a:fld id="{5BCAD085-E8A6-8845-BD4E-CB4CCA059FC4}" type="datetimeFigureOut">
               <a:rPr lang="en-US" smtClean="0"/>
-              <a:t>5/20/2026</a:t>
+              <a:t>5/22/2026</a:t>
             </a:fld>
             <a:endParaRPr lang="en-US"/>
           </a:p>
@@ -1435,7 +1503,7 @@
           <a:p>
             <a:fld id="{5BCAD085-E8A6-8845-BD4E-CB4CCA059FC4}" type="datetimeFigureOut">
               <a:rPr lang="en-US" smtClean="0"/>
-              <a:t>5/20/2026</a:t>
+              <a:t>5/22/2026</a:t>
             </a:fld>
             <a:endParaRPr lang="en-US"/>
           </a:p>
@@ -1720,7 +1788,7 @@
           <a:p>
             <a:fld id="{5BCAD085-E8A6-8845-BD4E-CB4CCA059FC4}" type="datetimeFigureOut">
               <a:rPr lang="en-US" smtClean="0"/>
-              <a:t>5/20/2026</a:t>
+              <a:t>5/22/2026</a:t>
             </a:fld>
             <a:endParaRPr lang="en-US"/>
           </a:p>
@@ -2139,7 +2207,7 @@
           <a:p>
             <a:fld id="{5BCAD085-E8A6-8845-BD4E-CB4CCA059FC4}" type="datetimeFigureOut">
               <a:rPr lang="en-US" smtClean="0"/>
-              <a:t>5/20/2026</a:t>
+              <a:t>5/22/2026</a:t>
             </a:fld>
             <a:endParaRPr lang="en-US"/>
           </a:p>
@@ -2256,7 +2324,7 @@
           <a:p>
             <a:fld id="{5BCAD085-E8A6-8845-BD4E-CB4CCA059FC4}" type="datetimeFigureOut">
               <a:rPr lang="en-US" smtClean="0"/>
-              <a:t>5/20/2026</a:t>
+              <a:t>5/22/2026</a:t>
             </a:fld>
             <a:endParaRPr lang="en-US"/>
           </a:p>
@@ -2351,7 +2419,7 @@
           <a:p>
             <a:fld id="{5BCAD085-E8A6-8845-BD4E-CB4CCA059FC4}" type="datetimeFigureOut">
               <a:rPr lang="en-US" smtClean="0"/>
-              <a:t>5/20/2026</a:t>
+              <a:t>5/22/2026</a:t>
             </a:fld>
             <a:endParaRPr lang="en-US"/>
           </a:p>
@@ -2626,7 +2694,7 @@
           <a:p>
             <a:fld id="{5BCAD085-E8A6-8845-BD4E-CB4CCA059FC4}" type="datetimeFigureOut">
               <a:rPr lang="en-US" smtClean="0"/>
-              <a:t>5/20/2026</a:t>
+              <a:t>5/22/2026</a:t>
             </a:fld>
             <a:endParaRPr lang="en-US"/>
           </a:p>
@@ -2878,7 +2946,7 @@
           <a:p>
             <a:fld id="{5BCAD085-E8A6-8845-BD4E-CB4CCA059FC4}" type="datetimeFigureOut">
               <a:rPr lang="en-US" smtClean="0"/>
-              <a:t>5/20/2026</a:t>
+              <a:t>5/22/2026</a:t>
             </a:fld>
             <a:endParaRPr lang="en-US"/>
           </a:p>
@@ -3089,7 +3157,7 @@
           <a:p>
             <a:fld id="{5BCAD085-E8A6-8845-BD4E-CB4CCA059FC4}" type="datetimeFigureOut">
               <a:rPr lang="en-US" smtClean="0"/>
-              <a:t>5/20/2026</a:t>
+              <a:t>5/22/2026</a:t>
             </a:fld>
             <a:endParaRPr lang="en-US"/>
           </a:p>
@@ -6134,7 +6202,7 @@
           <a:p>
             <a:pPr algn="l"/>
             <a:r>
-              <a:rPr lang="es-MX" sz="2000" i="1">
+              <a:rPr lang="es-MX" sz="2000" i="1" dirty="0">
                 <a:solidFill>
                   <a:srgbClr val="2A9D8F"/>
                 </a:solidFill>
@@ -6232,7 +6300,7 @@
                 </a:solidFill>
                 <a:latin typeface="Aptos"/>
               </a:rPr>
-              <a:t>¿Qué destaca en el análisis?</a:t>
+              <a:t>¿Qué solución se propone?</a:t>
             </a:r>
             <a:endParaRPr sz="2000" i="1" dirty="0">
               <a:solidFill>
@@ -6803,7 +6871,7 @@
         </p:nvSpPr>
         <p:spPr>
           <a:xfrm>
-            <a:off x="573024" y="1089398"/>
+            <a:off x="640080" y="1124456"/>
             <a:ext cx="10058400" cy="1015663"/>
           </a:xfrm>
           <a:prstGeom prst="rect">
@@ -6892,7 +6960,7 @@
         <p:spPr>
           <a:xfrm>
             <a:off x="573024" y="2337149"/>
-            <a:ext cx="10058400" cy="1015663"/>
+            <a:ext cx="10058400" cy="1323439"/>
           </a:xfrm>
           <a:prstGeom prst="rect">
             <a:avLst/>
@@ -6907,7 +6975,31 @@
           <a:p>
             <a:r>
               <a:rPr lang="es-MX" sz="2000" dirty="0"/>
-              <a:t>El análisis de esta distribución define matemáticamente la norma del mercado: el crecimiento promedio esperado de un prospecto joven es de 7 a 11 puntos. Todo lo que caiga en ese rango es un desarrollo estándar y predecible.</a:t>
+              <a:t>Este análisis se basa exclusivamente en un conjunto de datos de </a:t>
+            </a:r>
+            <a:r>
+              <a:rPr lang="es-MX" sz="2000" b="1" dirty="0"/>
+              <a:t>ligas de primera división europea</a:t>
+            </a:r>
+            <a:r>
+              <a:rPr lang="es-MX" sz="2000" dirty="0"/>
+              <a:t>. En base al histograma, podemos observar que el margen de crecimiento (gap) de un prospecto joven incluido en este </a:t>
+            </a:r>
+            <a:r>
+              <a:rPr lang="es-MX" sz="2000" dirty="0" err="1"/>
+              <a:t>dataset</a:t>
+            </a:r>
+            <a:r>
+              <a:rPr lang="es-MX" sz="2000" dirty="0"/>
+              <a:t> </a:t>
+            </a:r>
+            <a:r>
+              <a:rPr lang="es-MX" sz="2000" b="1" dirty="0"/>
+              <a:t>tiende a concentrarse entre los 7 y 11 puntos</a:t>
+            </a:r>
+            <a:r>
+              <a:rPr lang="es-MX" sz="2000" dirty="0"/>
+              <a:t>. Este comportamiento de la muestra define nuestro estándar de mercado.</a:t>
             </a:r>
             <a:endParaRPr sz="2000" b="1" dirty="0">
               <a:solidFill>
@@ -6932,7 +7024,7 @@
         </p:nvSpPr>
         <p:spPr>
           <a:xfrm>
-            <a:off x="573024" y="3338917"/>
+            <a:off x="573024" y="3460533"/>
             <a:ext cx="10058400" cy="400110"/>
           </a:xfrm>
           <a:prstGeom prst="rect">
